--- a/media/resources/files/Onduktar_Boluu3Tutashtyr.pptx
+++ b/media/resources/files/Onduktar_Boluu3Tutashtyr.pptx
@@ -7365,7 +7365,7 @@
                 <a:ea typeface="+mn-ea"/>
                 <a:cs typeface="+mn-cs"/>
               </a:rPr>
-              <a:t>Ошол команда үчүн квадратты талап кылуу үчүн жооп кутучасынын тиешелүү көлөкө тарабын чыкылдатыңыз/тийиңиз.</a:t>
+              <a:t>Ошол команданын квадратын ээлөө үчүн жооп кутучасынын боёлгон бөлүгүн басыңыз.</a:t>
             </a:r>
           </a:p>
           <a:p>
@@ -9508,7 +9508,7 @@
                           <a:latin typeface="Arial" panose="020B0604020202020204" pitchFamily="34" charset="0"/>
                           <a:cs typeface="Arial" panose="020B0604020202020204" pitchFamily="34" charset="0"/>
                         </a:rPr>
-                        <a:t>1.8 ÷ 0.3</a:t>
+                        <a:t>1,8 ÷ 0,3</a:t>
                       </a:r>
                     </a:p>
                   </a:txBody>
@@ -9565,7 +9565,7 @@
                           <a:latin typeface="Arial" panose="020B0604020202020204" pitchFamily="34" charset="0"/>
                           <a:cs typeface="Arial" panose="020B0604020202020204" pitchFamily="34" charset="0"/>
                         </a:rPr>
-                        <a:t>6.5 ÷ 0.5</a:t>
+                        <a:t>6,5 ÷ 0,5</a:t>
                       </a:r>
                     </a:p>
                   </a:txBody>
@@ -9629,7 +9629,7 @@
                           <a:latin typeface="Arial" panose="020B0604020202020204" pitchFamily="34" charset="0"/>
                           <a:cs typeface="Arial" panose="020B0604020202020204" pitchFamily="34" charset="0"/>
                         </a:rPr>
-                        <a:t>6 ÷ 0.6</a:t>
+                        <a:t>6 ÷ 0,6</a:t>
                       </a:r>
                     </a:p>
                   </a:txBody>
@@ -9686,7 +9686,7 @@
                           <a:latin typeface="Arial" panose="020B0604020202020204" pitchFamily="34" charset="0"/>
                           <a:cs typeface="Arial" panose="020B0604020202020204" pitchFamily="34" charset="0"/>
                         </a:rPr>
-                        <a:t>2.1 ÷ 0.7 </a:t>
+                        <a:t>2,1 ÷ 0,7 </a:t>
                       </a:r>
                     </a:p>
                   </a:txBody>
@@ -9750,7 +9750,7 @@
                           <a:latin typeface="Arial" panose="020B0604020202020204" pitchFamily="34" charset="0"/>
                           <a:cs typeface="Arial" panose="020B0604020202020204" pitchFamily="34" charset="0"/>
                         </a:rPr>
-                        <a:t>2.5 ÷ 0.5</a:t>
+                        <a:t>2,5 ÷ 0,5</a:t>
                       </a:r>
                     </a:p>
                   </a:txBody>
@@ -9807,7 +9807,7 @@
                           <a:latin typeface="Arial" panose="020B0604020202020204" pitchFamily="34" charset="0"/>
                           <a:cs typeface="Arial" panose="020B0604020202020204" pitchFamily="34" charset="0"/>
                         </a:rPr>
-                        <a:t>5.6 ÷ 0.4</a:t>
+                        <a:t>5,6 ÷ 0,4</a:t>
                       </a:r>
                     </a:p>
                   </a:txBody>
@@ -9871,7 +9871,7 @@
                           <a:latin typeface="Arial" panose="020B0604020202020204" pitchFamily="34" charset="0"/>
                           <a:cs typeface="Arial" panose="020B0604020202020204" pitchFamily="34" charset="0"/>
                         </a:rPr>
-                        <a:t>0.4 ÷ 0.1</a:t>
+                        <a:t>0,4 ÷ 0,1</a:t>
                       </a:r>
                     </a:p>
                   </a:txBody>
@@ -9928,7 +9928,7 @@
                           <a:latin typeface="Arial" panose="020B0604020202020204" pitchFamily="34" charset="0"/>
                           <a:cs typeface="Arial" panose="020B0604020202020204" pitchFamily="34" charset="0"/>
                         </a:rPr>
-                        <a:t>3.4 ÷ 0.2</a:t>
+                        <a:t>3,4 ÷ 0,2</a:t>
                       </a:r>
                     </a:p>
                   </a:txBody>
@@ -9992,7 +9992,7 @@
                           <a:latin typeface="Arial" panose="020B0604020202020204" pitchFamily="34" charset="0"/>
                           <a:cs typeface="Arial" panose="020B0604020202020204" pitchFamily="34" charset="0"/>
                         </a:rPr>
-                        <a:t>7.5 ÷ 0.5</a:t>
+                        <a:t>7,5 ÷ 0,5</a:t>
                       </a:r>
                     </a:p>
                   </a:txBody>
@@ -10049,7 +10049,7 @@
                           <a:latin typeface="Arial" panose="020B0604020202020204" pitchFamily="34" charset="0"/>
                           <a:cs typeface="Arial" panose="020B0604020202020204" pitchFamily="34" charset="0"/>
                         </a:rPr>
-                        <a:t>2.8 ÷ 0.4</a:t>
+                        <a:t>2,8 ÷ 0,4</a:t>
                       </a:r>
                     </a:p>
                   </a:txBody>
@@ -10113,7 +10113,7 @@
                           <a:latin typeface="Arial" panose="020B0604020202020204" pitchFamily="34" charset="0"/>
                           <a:cs typeface="Arial" panose="020B0604020202020204" pitchFamily="34" charset="0"/>
                         </a:rPr>
-                        <a:t>4.8 ÷ 0.6</a:t>
+                        <a:t>4,8 ÷ 0,6</a:t>
                       </a:r>
                     </a:p>
                   </a:txBody>
@@ -10170,7 +10170,7 @@
                           <a:latin typeface="Arial" panose="020B0604020202020204" pitchFamily="34" charset="0"/>
                           <a:cs typeface="Arial" panose="020B0604020202020204" pitchFamily="34" charset="0"/>
                         </a:rPr>
-                        <a:t>3.6 ÷ 0.3</a:t>
+                        <a:t>3,6 ÷ 0,3</a:t>
                       </a:r>
                     </a:p>
                   </a:txBody>
@@ -10234,7 +10234,7 @@
                           <a:latin typeface="Arial" panose="020B0604020202020204" pitchFamily="34" charset="0"/>
                           <a:cs typeface="Arial" panose="020B0604020202020204" pitchFamily="34" charset="0"/>
                         </a:rPr>
-                        <a:t>1.8 ÷ 0.2</a:t>
+                        <a:t>1,8 ÷ 0,2</a:t>
                       </a:r>
                     </a:p>
                   </a:txBody>
@@ -10291,7 +10291,7 @@
                           <a:latin typeface="Arial" panose="020B0604020202020204" pitchFamily="34" charset="0"/>
                           <a:cs typeface="Arial" panose="020B0604020202020204" pitchFamily="34" charset="0"/>
                         </a:rPr>
-                        <a:t>4.8 ÷ 0.3</a:t>
+                        <a:t>4,8 ÷ 0,3</a:t>
                       </a:r>
                     </a:p>
                   </a:txBody>
@@ -10355,7 +10355,7 @@
                           <a:latin typeface="Arial" panose="020B0604020202020204" pitchFamily="34" charset="0"/>
                           <a:cs typeface="Arial" panose="020B0604020202020204" pitchFamily="34" charset="0"/>
                         </a:rPr>
-                        <a:t>4.4 ÷ 0.4</a:t>
+                        <a:t>4,4 ÷ 0,4</a:t>
                       </a:r>
                     </a:p>
                   </a:txBody>
@@ -10412,7 +10412,7 @@
                           <a:latin typeface="Arial" panose="020B0604020202020204" pitchFamily="34" charset="0"/>
                           <a:cs typeface="Arial" panose="020B0604020202020204" pitchFamily="34" charset="0"/>
                         </a:rPr>
-                        <a:t>1.6 ÷ 0.8</a:t>
+                        <a:t>1,6 ÷ 0,8</a:t>
                       </a:r>
                     </a:p>
                   </a:txBody>
@@ -22621,7 +22621,7 @@
                           <a:latin typeface="Arial" panose="020B0604020202020204" pitchFamily="34" charset="0"/>
                           <a:cs typeface="Arial" panose="020B0604020202020204" pitchFamily="34" charset="0"/>
                         </a:rPr>
-                        <a:t>18.2 ÷ 1.4</a:t>
+                        <a:t>18,2 ÷ 1,4</a:t>
                       </a:r>
                     </a:p>
                   </a:txBody>
@@ -22678,7 +22678,7 @@
                           <a:latin typeface="Arial" panose="020B0604020202020204" pitchFamily="34" charset="0"/>
                           <a:cs typeface="Arial" panose="020B0604020202020204" pitchFamily="34" charset="0"/>
                         </a:rPr>
-                        <a:t>5.5 ÷ 1.1</a:t>
+                        <a:t>5,5 ÷ 1,1</a:t>
                       </a:r>
                     </a:p>
                   </a:txBody>
@@ -22742,7 +22742,7 @@
                           <a:latin typeface="Arial" panose="020B0604020202020204" pitchFamily="34" charset="0"/>
                           <a:cs typeface="Arial" panose="020B0604020202020204" pitchFamily="34" charset="0"/>
                         </a:rPr>
-                        <a:t>10.4 ÷ 1.3</a:t>
+                        <a:t>10,4 ÷ 1,3</a:t>
                       </a:r>
                     </a:p>
                   </a:txBody>
@@ -22799,7 +22799,7 @@
                           <a:latin typeface="Arial" panose="020B0604020202020204" pitchFamily="34" charset="0"/>
                           <a:cs typeface="Arial" panose="020B0604020202020204" pitchFamily="34" charset="0"/>
                         </a:rPr>
-                        <a:t>23.8 ÷ 1.4</a:t>
+                        <a:t>23,8 ÷ 1,4</a:t>
                       </a:r>
                     </a:p>
                   </a:txBody>
@@ -22863,7 +22863,7 @@
                           <a:latin typeface="Arial" panose="020B0604020202020204" pitchFamily="34" charset="0"/>
                           <a:cs typeface="Arial" panose="020B0604020202020204" pitchFamily="34" charset="0"/>
                         </a:rPr>
-                        <a:t>17.6 ÷ 1.1</a:t>
+                        <a:t>17,6 ÷ 1,1</a:t>
                       </a:r>
                     </a:p>
                   </a:txBody>
@@ -22920,7 +22920,7 @@
                           <a:latin typeface="Arial" panose="020B0604020202020204" pitchFamily="34" charset="0"/>
                           <a:cs typeface="Arial" panose="020B0604020202020204" pitchFamily="34" charset="0"/>
                         </a:rPr>
-                        <a:t>10.8 ÷ 1.2</a:t>
+                        <a:t>10,8 ÷ 1,2</a:t>
                       </a:r>
                     </a:p>
                   </a:txBody>
@@ -22984,7 +22984,7 @@
                           <a:latin typeface="Arial" panose="020B0604020202020204" pitchFamily="34" charset="0"/>
                           <a:cs typeface="Arial" panose="020B0604020202020204" pitchFamily="34" charset="0"/>
                         </a:rPr>
-                        <a:t>4.5 ÷ 1.5</a:t>
+                        <a:t>4,5 ÷ 1,5</a:t>
                       </a:r>
                     </a:p>
                   </a:txBody>
@@ -23041,7 +23041,7 @@
                           <a:latin typeface="Arial" panose="020B0604020202020204" pitchFamily="34" charset="0"/>
                           <a:cs typeface="Arial" panose="020B0604020202020204" pitchFamily="34" charset="0"/>
                         </a:rPr>
-                        <a:t>15.6 ÷ 1.3</a:t>
+                        <a:t>15,6 ÷ 1,3</a:t>
                       </a:r>
                     </a:p>
                   </a:txBody>
@@ -23105,7 +23105,7 @@
                           <a:latin typeface="Arial" panose="020B0604020202020204" pitchFamily="34" charset="0"/>
                           <a:cs typeface="Arial" panose="020B0604020202020204" pitchFamily="34" charset="0"/>
                         </a:rPr>
-                        <a:t>13 ÷ 1.3</a:t>
+                        <a:t>13 ÷ 1,3</a:t>
                       </a:r>
                     </a:p>
                   </a:txBody>
@@ -23162,7 +23162,7 @@
                           <a:latin typeface="Arial" panose="020B0604020202020204" pitchFamily="34" charset="0"/>
                           <a:cs typeface="Arial" panose="020B0604020202020204" pitchFamily="34" charset="0"/>
                         </a:rPr>
-                        <a:t>22.8 ÷ 1.2</a:t>
+                        <a:t>22,8 ÷ 1,2</a:t>
                       </a:r>
                     </a:p>
                   </a:txBody>
@@ -23226,7 +23226,7 @@
                           <a:latin typeface="Arial" panose="020B0604020202020204" pitchFamily="34" charset="0"/>
                           <a:cs typeface="Arial" panose="020B0604020202020204" pitchFamily="34" charset="0"/>
                         </a:rPr>
-                        <a:t>18 ÷ 1.2</a:t>
+                        <a:t>18 ÷ 1,2</a:t>
                       </a:r>
                     </a:p>
                   </a:txBody>
@@ -23283,7 +23283,7 @@
                           <a:latin typeface="Arial" panose="020B0604020202020204" pitchFamily="34" charset="0"/>
                           <a:cs typeface="Arial" panose="020B0604020202020204" pitchFamily="34" charset="0"/>
                         </a:rPr>
-                        <a:t>9.8 ÷ 1.4</a:t>
+                        <a:t>9,8 ÷ 1,4</a:t>
                       </a:r>
                     </a:p>
                   </a:txBody>
@@ -23347,7 +23347,7 @@
                           <a:latin typeface="Arial" panose="020B0604020202020204" pitchFamily="34" charset="0"/>
                           <a:cs typeface="Arial" panose="020B0604020202020204" pitchFamily="34" charset="0"/>
                         </a:rPr>
-                        <a:t>7.8 ÷ 1.3</a:t>
+                        <a:t>7,8 ÷ 1,3</a:t>
                       </a:r>
                     </a:p>
                   </a:txBody>
@@ -23404,7 +23404,7 @@
                           <a:latin typeface="Arial" panose="020B0604020202020204" pitchFamily="34" charset="0"/>
                           <a:cs typeface="Arial" panose="020B0604020202020204" pitchFamily="34" charset="0"/>
                         </a:rPr>
-                        <a:t>21 ÷ 1.5</a:t>
+                        <a:t>21 ÷ 1,5</a:t>
                       </a:r>
                     </a:p>
                   </a:txBody>
@@ -23468,7 +23468,7 @@
                           <a:latin typeface="Arial" panose="020B0604020202020204" pitchFamily="34" charset="0"/>
                           <a:cs typeface="Arial" panose="020B0604020202020204" pitchFamily="34" charset="0"/>
                         </a:rPr>
-                        <a:t>12.1 ÷ 1.1</a:t>
+                        <a:t>12,1 ÷ 1,1</a:t>
                       </a:r>
                     </a:p>
                   </a:txBody>
@@ -23525,7 +23525,7 @@
                           <a:latin typeface="Arial" panose="020B0604020202020204" pitchFamily="34" charset="0"/>
                           <a:cs typeface="Arial" panose="020B0604020202020204" pitchFamily="34" charset="0"/>
                         </a:rPr>
-                        <a:t>4.8 ÷ 1.2</a:t>
+                        <a:t>4,8 ÷ 1,2</a:t>
                       </a:r>
                     </a:p>
                   </a:txBody>
